--- a/docs/instructions/Polish/EU_SAE_Workbench_Guide_2_Running_the_Workbench_PL.pptx
+++ b/docs/instructions/Polish/EU_SAE_Workbench_Guide_2_Running_the_Workbench_PL.pptx
@@ -648,7 +648,7 @@
           <a:p>
             <a:r>
               <a:rPr lang="pl-PL"/>
-              <a:t>Aktualne ustawienia domyślne: UFH arcsin dla FGT0 z odrębną wariancją opartą na efektywnej liczebności próby; sm_all bez transformacji lub dla logarytmu średniego dobrobytu. Wybór wariancji UFH jest dostępny i uwzględniany dla modeli logarytmicznych. Domyślne MFH: sm_all i rho_sm_all, MFH2 oraz AIC. Jawnie zapisane wybory są zachowane. Brakująca opcja kowariancji MFH wynika z faktycznie używanej opcji wariancji. sm_out pozostaje opcją analizy wrażliwości z niezmienionym progiem 0,001 na skali modelowania. Te zrzuty i wyniki ze 100 replikacjami są historycznymi przykładami w5o, a nie wynikami nowych ustawień domyślnych.</a:t>
+              <a:t>Aktualne ustawienia domyślne: UFH arcsin dla FGT0 z odrębną wariancją opartą na efektywnej liczebności próby; sm_out bez transformacji lub dla logarytmu średniego dobrobytu. Wybór wariancji UFH jest dostępny i uwzględniany dla modeli logarytmicznych. Domyślne MFH: sm_out i rho_sm_out, MFH2 oraz AIC. Jawnie zapisane wybory są zachowane. Brakująca opcja kowariancji MFH wynika z faktycznie używanej opcji wariancji. sm_out zachowuje próg 0,001 na skali modelowania. sm_all pozostaje dostępną opcją; ponieważ jego GVF opiera się wyłącznie na liczebności próby, może zawyżać wariancje obszarów o niskim ubóstwie (sekcja 6.6 wytycznych). Te zrzuty i wyniki ze 100 replikacjami są historycznymi przykładami w5o.</a:t>
             </a:r>
             <a:endParaRPr lang="pl-PL"/>
           </a:p>
@@ -3666,7 +3666,7 @@
                   <a:srgbClr val="33415C"/>
                 </a:solidFill>
               </a:rPr>
-              <a:t>MFH2, sm_all / rho_sm_all, 500 replikacji. Zapisane wybory są zachowane.</a:t>
+              <a:t>MFH2, sm_out / rho_sm_out, 500 replikacji. Zapisane wybory są zachowane.</a:t>
             </a:r>
             <a:endParaRPr lang="pl-PL" sz="1150"/>
           </a:p>

--- a/docs/instructions/Polish/EU_SAE_Workbench_Guide_2_Running_the_Workbench_PL.pptx
+++ b/docs/instructions/Polish/EU_SAE_Workbench_Guide_2_Running_the_Workbench_PL.pptx
@@ -3702,7 +3702,7 @@
                   <a:srgbClr val="16233D"/>
                 </a:solidFill>
               </a:rPr>
-              <a:t>Spójne kody PSU</a:t>
+              <a:t>Schemat PSU między latami</a:t>
             </a:r>
             <a:endParaRPr lang="pl-PL" sz="1150"/>
           </a:p>
@@ -3716,7 +3716,7 @@
                   <a:srgbClr val="33415C"/>
                 </a:solidFill>
               </a:rPr>
-              <a:t>W Data assessment: zaznacz tylko, gdy kody oznaczają te same jednostki w obu latach.</a:t>
+              <a:t>Wybierz na podstawie schematu badania. MFH nie działa przy „Not specified”.</a:t>
             </a:r>
             <a:endParaRPr lang="pl-PL" sz="1150"/>
           </a:p>

--- a/docs/instructions/Polish/EU_SAE_Workbench_Guide_2_Running_the_Workbench_PL.pptx
+++ b/docs/instructions/Polish/EU_SAE_Workbench_Guide_2_Running_the_Workbench_PL.pptx
@@ -3992,19 +3992,13 @@
               <a:buSzPct val="100000"/>
               <a:buChar char="•"/>
             </a:pPr>
-            <a:pPr indent="0" marL="0">
-              <a:spcAft>
-                <a:spcPts val="600"/>
-              </a:spcAft>
-              <a:buNone/>
-            </a:pPr>
             <a:r>
               <a:rPr lang="pl-PL" sz="1250" b="1">
                 <a:solidFill>
                   <a:srgbClr val="16233D"/>
                 </a:solidFill>
               </a:rPr>
-              <a:t xml:space="preserve">National: </a:t>
+              <a:t>National: </a:t>
             </a:r>
             <a:r>
               <a:rPr lang="pl-PL" sz="1250">
@@ -4024,19 +4018,13 @@
               <a:buSzPct val="100000"/>
               <a:buChar char="•"/>
             </a:pPr>
-            <a:pPr indent="0" marL="0">
-              <a:spcAft>
-                <a:spcPts val="600"/>
-              </a:spcAft>
-              <a:buNone/>
-            </a:pPr>
             <a:r>
               <a:rPr lang="pl-PL" sz="1250" b="1">
                 <a:solidFill>
                   <a:srgbClr val="16233D"/>
                 </a:solidFill>
               </a:rPr>
-              <a:t xml:space="preserve">Grouped by a survey variable: </a:t>
+              <a:t>Grouped by a survey variable: </a:t>
             </a:r>
             <a:r>
               <a:rPr lang="pl-PL" sz="1250">
@@ -4056,19 +4044,13 @@
               <a:buSzPct val="100000"/>
               <a:buChar char="•"/>
             </a:pPr>
-            <a:pPr indent="0" marL="0">
-              <a:spcAft>
-                <a:spcPts val="600"/>
-              </a:spcAft>
-              <a:buNone/>
-            </a:pPr>
             <a:r>
               <a:rPr lang="pl-PL" sz="1250" b="1">
                 <a:solidFill>
                   <a:srgbClr val="16233D"/>
                 </a:solidFill>
               </a:rPr>
-              <a:t xml:space="preserve">Każda domena musi należeć do jednej grupy. </a:t>
+              <a:t>Każda domena musi należeć do jednej grupy. </a:t>
             </a:r>
             <a:r>
               <a:rPr lang="pl-PL" sz="1250">
@@ -4088,19 +4070,13 @@
               <a:buSzPct val="100000"/>
               <a:buChar char="•"/>
             </a:pPr>
-            <a:pPr indent="0" marL="0">
-              <a:spcAft>
-                <a:spcPts val="600"/>
-              </a:spcAft>
-              <a:buNone/>
-            </a:pPr>
             <a:r>
               <a:rPr lang="pl-PL" sz="1250" b="1">
                 <a:solidFill>
                   <a:srgbClr val="16233D"/>
                 </a:solidFill>
               </a:rPr>
-              <a:t xml:space="preserve">Plik wartości docelowych (opcjonalny): </a:t>
+              <a:t>Plik wartości docelowych (opcjonalny): </a:t>
             </a:r>
             <a:r>
               <a:rPr lang="pl-PL" sz="1250">
@@ -8531,19 +8507,13 @@
               <a:buSzPct val="100000"/>
               <a:buChar char="•"/>
             </a:pPr>
-            <a:pPr indent="0" marL="0">
-              <a:spcAft>
-                <a:spcPts val="400"/>
-              </a:spcAft>
-              <a:buNone/>
-            </a:pPr>
             <a:r>
               <a:rPr lang="pl-PL" sz="1150" b="1">
                 <a:solidFill>
                   <a:srgbClr val="16233D"/>
                 </a:solidFill>
               </a:rPr>
-              <a:t xml:space="preserve">Save configuration: </a:t>
+              <a:t>Save configuration: </a:t>
             </a:r>
             <a:r>
               <a:rPr lang="pl-PL" sz="1150">
@@ -8563,19 +8533,13 @@
               <a:buSzPct val="100000"/>
               <a:buChar char="•"/>
             </a:pPr>
-            <a:pPr indent="0" marL="0">
-              <a:spcAft>
-                <a:spcPts val="400"/>
-              </a:spcAft>
-              <a:buNone/>
-            </a:pPr>
             <a:r>
               <a:rPr lang="pl-PL" sz="1150" b="1">
                 <a:solidFill>
                   <a:srgbClr val="16233D"/>
                 </a:solidFill>
               </a:rPr>
-              <a:t xml:space="preserve">Wczytanie: </a:t>
+              <a:t>Wczytanie: </a:t>
             </a:r>
             <a:r>
               <a:rPr lang="pl-PL" sz="1150">
@@ -8617,19 +8581,13 @@
               <a:buSzPct val="100000"/>
               <a:buChar char="•"/>
             </a:pPr>
-            <a:pPr indent="0" marL="0">
-              <a:spcAft>
-                <a:spcPts val="400"/>
-              </a:spcAft>
-              <a:buNone/>
-            </a:pPr>
             <a:r>
               <a:rPr lang="pl-PL" sz="1150" b="1">
                 <a:solidFill>
                   <a:srgbClr val="16233D"/>
                 </a:solidFill>
               </a:rPr>
-              <a:t xml:space="preserve">Zmieniony plik danych? </a:t>
+              <a:t>Zmieniony plik danych? </a:t>
             </a:r>
             <a:r>
               <a:rPr lang="pl-PL" sz="1150">
@@ -8649,19 +8607,13 @@
               <a:buSzPct val="100000"/>
               <a:buChar char="•"/>
             </a:pPr>
-            <a:pPr indent="0" marL="0">
-              <a:spcAft>
-                <a:spcPts val="400"/>
-              </a:spcAft>
-              <a:buNone/>
-            </a:pPr>
             <a:r>
               <a:rPr lang="pl-PL" sz="1150" b="1">
                 <a:solidFill>
                   <a:srgbClr val="16233D"/>
                 </a:solidFill>
               </a:rPr>
-              <a:t xml:space="preserve">Reset to defaults </a:t>
+              <a:t>Reset to defaults </a:t>
             </a:r>
             <a:r>
               <a:rPr lang="pl-PL" sz="1150">
@@ -15620,19 +15572,13 @@
               <a:buSzPct val="100000"/>
               <a:buChar char="•"/>
             </a:pPr>
-            <a:pPr indent="0" marL="0">
-              <a:spcAft>
-                <a:spcPts val="600"/>
-              </a:spcAft>
-              <a:buNone/>
-            </a:pPr>
             <a:r>
               <a:rPr lang="pl-PL" sz="1200" b="1">
                 <a:solidFill>
                   <a:srgbClr val="16233D"/>
                 </a:solidFill>
               </a:rPr>
-              <a:t xml:space="preserve">A household: </a:t>
+              <a:t>A household: </a:t>
             </a:r>
             <a:r>
               <a:rPr lang="pl-PL" sz="1200">
@@ -15652,19 +15598,13 @@
               <a:buSzPct val="100000"/>
               <a:buChar char="•"/>
             </a:pPr>
-            <a:pPr indent="0" marL="0">
-              <a:spcAft>
-                <a:spcPts val="600"/>
-              </a:spcAft>
-              <a:buNone/>
-            </a:pPr>
             <a:r>
               <a:rPr lang="pl-PL" sz="1200" b="1">
                 <a:solidFill>
                   <a:srgbClr val="16233D"/>
                 </a:solidFill>
               </a:rPr>
-              <a:t xml:space="preserve">A person: </a:t>
+              <a:t>A person: </a:t>
             </a:r>
             <a:r>
               <a:rPr lang="pl-PL" sz="1200">
@@ -15684,19 +15624,13 @@
               <a:buSzPct val="100000"/>
               <a:buChar char="•"/>
             </a:pPr>
-            <a:pPr indent="0" marL="0">
-              <a:spcAft>
-                <a:spcPts val="600"/>
-              </a:spcAft>
-              <a:buNone/>
-            </a:pPr>
             <a:r>
               <a:rPr lang="pl-PL" sz="1200" b="1">
                 <a:solidFill>
                   <a:srgbClr val="16233D"/>
                 </a:solidFill>
               </a:rPr>
-              <a:t xml:space="preserve">Household ID (optional): </a:t>
+              <a:t>Household ID (optional): </a:t>
             </a:r>
             <a:r>
               <a:rPr lang="pl-PL" sz="1200">
